--- a/pptx-output/06-review-and-verify-ai-output-for-data-work.pptx
+++ b/pptx-output/06-review-and-verify-ai-output-for-data-work.pptx
@@ -1224,7 +1224,7 @@
           <a:lstStyle/>
           <a:p>
             <a:r>
-              <a:t>Emphasize meaning preservation.</a:t>
+              <a:t>This is a realistic and dangerous scenario. The AI-rewritten measure looks cleaner and is syntactically valid. A style-only review would approve it. But comparing to the original reveals that Discounts was silently dropped. Ask learners: how would you catch this without the side-by-side? Answer: always compare to the approved definition, not just to syntax.</a:t>
             </a:r>
           </a:p>
         </p:txBody>
@@ -1294,7 +1294,7 @@
           <a:lstStyle/>
           <a:p>
             <a:r>
-              <a:t>Missing prerequisites are a common failure point in notebook work.</a:t>
+              <a:t>This is subtle. The AI added a preprocessing step that looks reasonable but defeats the existing reproducibility guard. The `random_state` in `train_test_split` becomes meaningless if the input data order changes every run. Ask learners: would a code-only review catch this? Usually not -- you need to think about the data flow.</a:t>
             </a:r>
           </a:p>
         </p:txBody>
@@ -1364,7 +1364,7 @@
           <a:lstStyle/>
           <a:p>
             <a:r>
-              <a:t>DE review should always consider downstream impact.</a:t>
+              <a:t>The AI added a join that looks useful (product info enrichment) but introduced a dependency the pipeline scheduler does not know about. If `staging.products` loads at 06:00 and this job runs at 05:00, you get yesterday's product data or missing rows. Ask: how does your team track which tables a job depends on? That is the review question for DE work.</a:t>
             </a:r>
           </a:p>
         </p:txBody>
@@ -10876,7 +10876,7 @@
                 </a:solidFill>
                 <a:latin typeface="Segoe UI"/>
               </a:rPr>
-              <a:t>BI Review Lens</a:t>
+              <a:t>BI Review Lens -- Spot The Business Logic Error</a:t>
             </a:r>
           </a:p>
         </p:txBody>
@@ -11005,7 +11005,7 @@
                 </a:solidFill>
                 <a:latin typeface="Segoe UI"/>
               </a:rPr>
-              <a:t>definitions</a:t>
+              <a:t>Scenario: Copilot rewrote a DAX measure. Find the mistake before approving.</a:t>
             </a:r>
           </a:p>
           <a:p>
@@ -11033,7 +11033,7 @@
                 </a:solidFill>
                 <a:latin typeface="Segoe UI"/>
               </a:rPr>
-              <a:t>metrics</a:t>
+              <a:t>What changed? The AI **dropped the Discounts subtraction**.</a:t>
             </a:r>
           </a:p>
           <a:p>
@@ -11061,7 +11061,35 @@
                 </a:solidFill>
                 <a:latin typeface="Segoe UI"/>
               </a:rPr>
-              <a:t>business assumptions</a:t>
+              <a:t>Impact: Net revenue will be overstated in every report using this measure.</a:t>
+            </a:r>
+          </a:p>
+          <a:p>
+            <a:pPr>
+              <a:spcBef>
+                <a:spcPts val="400"/>
+              </a:spcBef>
+              <a:spcAft>
+                <a:spcPts val="800"/>
+              </a:spcAft>
+            </a:pPr>
+            <a:r>
+              <a:rPr sz="1600">
+                <a:solidFill>
+                  <a:srgbClr val="0078D4"/>
+                </a:solidFill>
+                <a:latin typeface="Segoe UI"/>
+              </a:rPr>
+              <a:t>●  </a:t>
+            </a:r>
+            <a:r>
+              <a:rPr sz="1800">
+                <a:solidFill>
+                  <a:srgbClr val="2C3E50"/>
+                </a:solidFill>
+                <a:latin typeface="Segoe UI"/>
+              </a:rPr>
+              <a:t>Verdict: **Reject.** The AI simplified the formula but broke the business definition.</a:t>
             </a:r>
           </a:p>
         </p:txBody>
@@ -11179,7 +11207,7 @@
                 </a:solidFill>
                 <a:latin typeface="Segoe UI"/>
               </a:rPr>
-              <a:t>Emphasize meaning preservation.</a:t>
+              <a:t>This is a realistic and dangerous scenario. The AI-rewritten measure looks cleaner and is syntactically valid. A style-only review would approve it. But comparing to the original reveals that Discounts was silently dropped. Ask learners: how would you catch this without the side-by-side? Answer: always compare to the approved definition, not just to syntax.</a:t>
             </a:r>
           </a:p>
         </p:txBody>
@@ -11377,7 +11405,7 @@
                 </a:solidFill>
                 <a:latin typeface="Segoe UI"/>
               </a:rPr>
-              <a:t>DS Review Lens</a:t>
+              <a:t>DS Review Lens -- Spot The Reproducibility Gap</a:t>
             </a:r>
           </a:p>
         </p:txBody>
@@ -11506,7 +11534,7 @@
                 </a:solidFill>
                 <a:latin typeface="Segoe UI"/>
               </a:rPr>
-              <a:t>prerequisites</a:t>
+              <a:t>Scenario: Copilot added a preprocessing step to a notebook. Find the reproducibility risk.</a:t>
             </a:r>
           </a:p>
           <a:p>
@@ -11534,7 +11562,7 @@
                 </a:solidFill>
                 <a:latin typeface="Segoe UI"/>
               </a:rPr>
-              <a:t>environment assumptions</a:t>
+              <a:t>What changed? The AI added `df.sample(frac=1)` **without a random seed**.</a:t>
             </a:r>
           </a:p>
           <a:p>
@@ -11562,7 +11590,35 @@
                 </a:solidFill>
                 <a:latin typeface="Segoe UI"/>
               </a:rPr>
-              <a:t>reproducibility steps</a:t>
+              <a:t>Impact: Every run produces a different shuffle before the split. `random_state=42` in `train_test_split` no longer guarantees the same split.</a:t>
+            </a:r>
+          </a:p>
+          <a:p>
+            <a:pPr>
+              <a:spcBef>
+                <a:spcPts val="400"/>
+              </a:spcBef>
+              <a:spcAft>
+                <a:spcPts val="800"/>
+              </a:spcAft>
+            </a:pPr>
+            <a:r>
+              <a:rPr sz="1600">
+                <a:solidFill>
+                  <a:srgbClr val="0078D4"/>
+                </a:solidFill>
+                <a:latin typeface="Segoe UI"/>
+              </a:rPr>
+              <a:t>●  </a:t>
+            </a:r>
+            <a:r>
+              <a:rPr sz="1800">
+                <a:solidFill>
+                  <a:srgbClr val="2C3E50"/>
+                </a:solidFill>
+                <a:latin typeface="Segoe UI"/>
+              </a:rPr>
+              <a:t>Verdict: **Revise.** Add `random_state=42` to `df.sample()` or remove the shuffle since `train_test_split` already randomizes.</a:t>
             </a:r>
           </a:p>
         </p:txBody>
@@ -11680,7 +11736,7 @@
                 </a:solidFill>
                 <a:latin typeface="Segoe UI"/>
               </a:rPr>
-              <a:t>Missing prerequisites are a common failure point in notebook work.</a:t>
+              <a:t>This is subtle. The AI added a preprocessing step that looks reasonable but defeats the existing reproducibility guard. The `random_state` in `train_test_split` becomes meaningless if the input data order changes every run. Ask learners: would a code-only review catch this? Usually not -- you need to think about the data flow.</a:t>
             </a:r>
           </a:p>
         </p:txBody>
@@ -11878,7 +11934,7 @@
                 </a:solidFill>
                 <a:latin typeface="Segoe UI"/>
               </a:rPr>
-              <a:t>DE Review Lens</a:t>
+              <a:t>DE Review Lens -- Spot The Dependency Issue</a:t>
             </a:r>
           </a:p>
         </p:txBody>
@@ -12007,7 +12063,7 @@
                 </a:solidFill>
                 <a:latin typeface="Segoe UI"/>
               </a:rPr>
-              <a:t>dependencies</a:t>
+              <a:t>Scenario: Copilot optimized a pipeline SQL query. Find the operational risk.</a:t>
             </a:r>
           </a:p>
           <a:p>
@@ -12035,7 +12091,7 @@
                 </a:solidFill>
                 <a:latin typeface="Segoe UI"/>
               </a:rPr>
-              <a:t>failure handling</a:t>
+              <a:t>What changed? The AI added a **JOIN to staging.products** that was not in the original.</a:t>
             </a:r>
           </a:p>
           <a:p>
@@ -12063,7 +12119,35 @@
                 </a:solidFill>
                 <a:latin typeface="Segoe UI"/>
               </a:rPr>
-              <a:t>scheduling and operations</a:t>
+              <a:t>Impact: If `staging.products` is not refreshed before this job runs, the join produces stale or missing data. The pipeline now has an **undeclared upstream dependency**.</a:t>
+            </a:r>
+          </a:p>
+          <a:p>
+            <a:pPr>
+              <a:spcBef>
+                <a:spcPts val="400"/>
+              </a:spcBef>
+              <a:spcAft>
+                <a:spcPts val="800"/>
+              </a:spcAft>
+            </a:pPr>
+            <a:r>
+              <a:rPr sz="1600">
+                <a:solidFill>
+                  <a:srgbClr val="0078D4"/>
+                </a:solidFill>
+                <a:latin typeface="Segoe UI"/>
+              </a:rPr>
+              <a:t>●  </a:t>
+            </a:r>
+            <a:r>
+              <a:rPr sz="1800">
+                <a:solidFill>
+                  <a:srgbClr val="2C3E50"/>
+                </a:solidFill>
+                <a:latin typeface="Segoe UI"/>
+              </a:rPr>
+              <a:t>Verdict: **Reject.** The new join adds a dependency that is not in the DAG schedule.</a:t>
             </a:r>
           </a:p>
         </p:txBody>
@@ -12181,7 +12265,7 @@
                 </a:solidFill>
                 <a:latin typeface="Segoe UI"/>
               </a:rPr>
-              <a:t>DE review should always consider downstream impact.</a:t>
+              <a:t>The AI added a join that looks useful (product info enrichment) but introduced a dependency the pipeline scheduler does not know about. If `staging.products` loads at 06:00 and this job runs at 05:00, you get yesterday's product data or missing rows. Ask: how does your team track which tables a job depends on? That is the review question for DE work.</a:t>
             </a:r>
           </a:p>
         </p:txBody>
